--- a/classes/parte-18-ia-aplicada-a-la-ciberseguridad/335-explotacion-y-post-explotacion-autorizada-asistida-por-ia/clase-335-presentacion.pptx
+++ b/classes/parte-18-ia-aplicada-a-la-ciberseguridad/335-explotacion-y-post-explotacion-autorizada-asistida-por-ia/clase-335-presentacion.pptx
@@ -17,6 +17,10 @@
     <p:sldId id="265" r:id="rId16"/>
     <p:sldId id="266" r:id="rId17"/>
     <p:sldId id="267" r:id="rId18"/>
+    <p:sldId id="268" r:id="rId19"/>
+    <p:sldId id="269" r:id="rId20"/>
+    <p:sldId id="270" r:id="rId21"/>
+    <p:sldId id="271" r:id="rId22"/>
   </p:sldIdLst>
   <p:sldSz cx="9144000" cy="6858000" type="screen4x3"/>
   <p:notesSz cx="6858000" cy="9144000"/>
@@ -3198,7 +3202,7 @@
                   <a:srgbClr val="0B3D2E"/>
                 </a:solidFill>
               </a:rPr>
-              <a:t>⚠️ Errores comunes</a:t>
+              <a:t>🧪 Laboratorio guiado</a:t>
             </a:r>
           </a:p>
         </p:txBody>
@@ -3236,67 +3240,67 @@
                   <a:srgbClr val="22282E"/>
                 </a:solidFill>
               </a:rPr>
-              <a:t>•  Dejar que el agente explote automáticamente — Riesgo legal y de daño. Exige aprobación humana por acción.</a:t>
-            </a:r>
-          </a:p>
-          <a:p>
-            <a:pPr>
-              <a:spcAft>
-                <a:spcPts val="600"/>
-              </a:spcAft>
-            </a:pPr>
-            <a:r>
-              <a:rPr sz="1500">
-                <a:solidFill>
-                  <a:srgbClr val="22282E"/>
-                </a:solidFill>
-              </a:rPr>
-              <a:t>•  PoC que causa más daño del necesario — Limítate a demostrar; no escales el impacto.</a:t>
-            </a:r>
-          </a:p>
-          <a:p>
-            <a:pPr>
-              <a:spcAft>
-                <a:spcPts val="600"/>
-              </a:spcAft>
-            </a:pPr>
-            <a:r>
-              <a:rPr sz="1500">
-                <a:solidFill>
-                  <a:srgbClr val="22282E"/>
-                </a:solidFill>
-              </a:rPr>
-              <a:t>•  No registrar lo que se hizo — Sin trazabilidad no hay informe ni defensa legal. Loguea todo.</a:t>
-            </a:r>
-          </a:p>
-          <a:p>
-            <a:pPr>
-              <a:spcAft>
-                <a:spcPts val="600"/>
-              </a:spcAft>
-            </a:pPr>
-            <a:r>
-              <a:rPr sz="1500">
-                <a:solidFill>
-                  <a:srgbClr val="22282E"/>
-                </a:solidFill>
-              </a:rPr>
-              <a:t>•  Delegar decisiones destructivas — Nunca. Borrar/cifrar/modificar exige criterio humano explícito.</a:t>
-            </a:r>
-          </a:p>
-          <a:p>
-            <a:pPr>
-              <a:spcAft>
-                <a:spcPts val="600"/>
-              </a:spcAft>
-            </a:pPr>
-            <a:r>
-              <a:rPr sz="1500">
-                <a:solidFill>
-                  <a:srgbClr val="22282E"/>
-                </a:solidFill>
-              </a:rPr>
-              <a:t>•  Salir del alcance "porque el agente lo sugirió" — El alcance manda sobre la IA. Corta y redefine.</a:t>
+              <a:t>•  Priorización de vectores. Pide al agente que, a partir del recon, priorice posibles vías de entrada sin ejecutarlas. Revisa su razonamiento.</a:t>
+            </a:r>
+          </a:p>
+          <a:p>
+            <a:pPr>
+              <a:spcAft>
+                <a:spcPts val="600"/>
+              </a:spcAft>
+            </a:pPr>
+            <a:r>
+              <a:rPr sz="1500">
+                <a:solidFill>
+                  <a:srgbClr val="22282E"/>
+                </a:solidFill>
+              </a:rPr>
+              <a:t>•  Decisión humana. Elige tú un vector de PoC de bajo impacto y apruébalo explícitamente.</a:t>
+            </a:r>
+          </a:p>
+          <a:p>
+            <a:pPr>
+              <a:spcAft>
+                <a:spcPts val="600"/>
+              </a:spcAft>
+            </a:pPr>
+            <a:r>
+              <a:rPr sz="1500">
+                <a:solidFill>
+                  <a:srgbClr val="22282E"/>
+                </a:solidFill>
+              </a:rPr>
+              <a:t>•  Ejecución supervisada. Ejecuta la PoC (p. ej. demostrar acceso con un comando inocuo). Registra comando y resultado.</a:t>
+            </a:r>
+          </a:p>
+          <a:p>
+            <a:pPr>
+              <a:spcAft>
+                <a:spcPts val="600"/>
+              </a:spcAft>
+            </a:pPr>
+            <a:r>
+              <a:rPr sz="1500">
+                <a:solidFill>
+                  <a:srgbClr val="22282E"/>
+                </a:solidFill>
+              </a:rPr>
+              <a:t>•  Post-explotación mínima. Enumera el sistema para demostrar impacto sin tocar datos ni escalar daño.</a:t>
+            </a:r>
+          </a:p>
+          <a:p>
+            <a:pPr>
+              <a:spcAft>
+                <a:spcPts val="600"/>
+              </a:spcAft>
+            </a:pPr>
+            <a:r>
+              <a:rPr sz="1500">
+                <a:solidFill>
+                  <a:srgbClr val="22282E"/>
+                </a:solidFill>
+              </a:rPr>
+              <a:t>•  Trazabilidad. Reconstruye la línea de tiempo de la sesión: cada acción aprobada, ejecutada y su evidencia.</a:t>
             </a:r>
           </a:p>
         </p:txBody>
@@ -3347,7 +3351,7 @@
                   <a:srgbClr val="0B3D2E"/>
                 </a:solidFill>
               </a:rPr>
-              <a:t>❓ Preguntas frecuentes</a:t>
+              <a:t>✍️ Ejercicios</a:t>
             </a:r>
           </a:p>
         </p:txBody>
@@ -3385,82 +3389,67 @@
                   <a:srgbClr val="22282E"/>
                 </a:solidFill>
               </a:rPr>
-              <a:t>•  ❓ ¿La IA puede explotar sola una máquina?</a:t>
-            </a:r>
-          </a:p>
-          <a:p>
-            <a:pPr>
-              <a:spcAft>
-                <a:spcPts val="600"/>
-              </a:spcAft>
-            </a:pPr>
-            <a:r>
-              <a:rPr sz="1500">
-                <a:solidFill>
-                  <a:srgbClr val="22282E"/>
-                </a:solidFill>
-              </a:rPr>
-              <a:t>•  Técnicamente puede encadenar herramientas, pero no debe hacerlo sin supervisión: el riesgo</a:t>
-            </a:r>
-          </a:p>
-          <a:p>
-            <a:pPr>
-              <a:spcAft>
-                <a:spcPts val="600"/>
-              </a:spcAft>
-            </a:pPr>
-            <a:r>
-              <a:rPr sz="1500">
-                <a:solidFill>
-                  <a:srgbClr val="22282E"/>
-                </a:solidFill>
-              </a:rPr>
-              <a:t>•  legal, de daño y de salir de alcance es demasiado alto. La responsabilidad es humana.</a:t>
-            </a:r>
-          </a:p>
-          <a:p>
-            <a:pPr>
-              <a:spcAft>
-                <a:spcPts val="600"/>
-              </a:spcAft>
-            </a:pPr>
-            <a:r>
-              <a:rPr sz="1500">
-                <a:solidFill>
-                  <a:srgbClr val="22282E"/>
-                </a:solidFill>
-              </a:rPr>
-              <a:t>•  ❓ ¿Esto no facilita el mal uso?</a:t>
-            </a:r>
-          </a:p>
-          <a:p>
-            <a:pPr>
-              <a:spcAft>
-                <a:spcPts val="600"/>
-              </a:spcAft>
-            </a:pPr>
-            <a:r>
-              <a:rPr sz="1500">
-                <a:solidFill>
-                  <a:srgbClr val="22282E"/>
-                </a:solidFill>
-              </a:rPr>
-              <a:t>•  La metodología aquí es de supervisión y control, la misma que exige un pentest profesional.</a:t>
-            </a:r>
-          </a:p>
-          <a:p>
-            <a:pPr>
-              <a:spcAft>
-                <a:spcPts val="600"/>
-              </a:spcAft>
-            </a:pPr>
-            <a:r>
-              <a:rPr sz="1500">
-                <a:solidFill>
-                  <a:srgbClr val="22282E"/>
-                </a:solidFill>
-              </a:rPr>
-              <a:t>•  El énfasis está en autorización, límites y trazabilidad — justo lo contrario del abuso.</a:t>
+              <a:t>•  ¿Por qué la decisión de explotar no debe delegarse en la IA?</a:t>
+            </a:r>
+          </a:p>
+          <a:p>
+            <a:pPr>
+              <a:spcAft>
+                <a:spcPts val="600"/>
+              </a:spcAft>
+            </a:pPr>
+            <a:r>
+              <a:rPr sz="1500">
+                <a:solidFill>
+                  <a:srgbClr val="22282E"/>
+                </a:solidFill>
+              </a:rPr>
+              <a:t>•  Define 3 acciones que siempre requieren aprobación humana.</a:t>
+            </a:r>
+          </a:p>
+          <a:p>
+            <a:pPr>
+              <a:spcAft>
+                <a:spcPts val="600"/>
+              </a:spcAft>
+            </a:pPr>
+            <a:r>
+              <a:rPr sz="1500">
+                <a:solidFill>
+                  <a:srgbClr val="22282E"/>
+                </a:solidFill>
+              </a:rPr>
+              <a:t>•  Diseña el registro mínimo de trazabilidad de una acción de explotación.</a:t>
+            </a:r>
+          </a:p>
+          <a:p>
+            <a:pPr>
+              <a:spcAft>
+                <a:spcPts val="600"/>
+              </a:spcAft>
+            </a:pPr>
+            <a:r>
+              <a:rPr sz="1500">
+                <a:solidFill>
+                  <a:srgbClr val="22282E"/>
+                </a:solidFill>
+              </a:rPr>
+              <a:t>•  ¿Qué es una PoC de bajo impacto y por qué se prefiere?</a:t>
+            </a:r>
+          </a:p>
+          <a:p>
+            <a:pPr>
+              <a:spcAft>
+                <a:spcPts val="600"/>
+              </a:spcAft>
+            </a:pPr>
+            <a:r>
+              <a:rPr sz="1500">
+                <a:solidFill>
+                  <a:srgbClr val="22282E"/>
+                </a:solidFill>
+              </a:rPr>
+              <a:t>•  Enumera límites de post-explotación que pondrías por escrito en las RoE.</a:t>
             </a:r>
           </a:p>
         </p:txBody>
@@ -3511,7 +3500,7 @@
                   <a:srgbClr val="0B3D2E"/>
                 </a:solidFill>
               </a:rPr>
-              <a:t>🔗 Referencias</a:t>
+              <a:t>📝 Reto verificable</a:t>
             </a:r>
           </a:p>
         </p:txBody>
@@ -3549,6 +3538,453 @@
                   <a:srgbClr val="22282E"/>
                 </a:solidFill>
               </a:rPr>
+              <a:t>•  Demuestra, en tu VM, una vulnerabilidad con una PoC de bajo impacto asistido por el agente,</a:t>
+            </a:r>
+          </a:p>
+          <a:p>
+            <a:pPr>
+              <a:spcAft>
+                <a:spcPts val="600"/>
+              </a:spcAft>
+            </a:pPr>
+            <a:r>
+              <a:rPr sz="1500">
+                <a:solidFill>
+                  <a:srgbClr val="22282E"/>
+                </a:solidFill>
+              </a:rPr>
+              <a:t>•  con trazabilidad completa.</a:t>
+            </a:r>
+          </a:p>
+          <a:p>
+            <a:pPr>
+              <a:spcAft>
+                <a:spcPts val="600"/>
+              </a:spcAft>
+            </a:pPr>
+            <a:r>
+              <a:rPr sz="1500">
+                <a:solidFill>
+                  <a:srgbClr val="22282E"/>
+                </a:solidFill>
+              </a:rPr>
+              <a:t>•  Criterio de aceptación: cada acción con impacto fue aprobada por ti antes de ejecutarse;</a:t>
+            </a:r>
+          </a:p>
+          <a:p>
+            <a:pPr>
+              <a:spcAft>
+                <a:spcPts val="600"/>
+              </a:spcAft>
+            </a:pPr>
+            <a:r>
+              <a:rPr sz="1500">
+                <a:solidFill>
+                  <a:srgbClr val="22282E"/>
+                </a:solidFill>
+              </a:rPr>
+              <a:t>•  existe un registro reproducible; no se tocaron datos reales ni se salió del alcance.</a:t>
+            </a:r>
+          </a:p>
+        </p:txBody>
+      </p:sp>
+    </p:spTree>
+  </p:cSld>
+  <p:clrMapOvr>
+    <a:masterClrMapping/>
+  </p:clrMapOvr>
+</p:sld>
+</file>
+
+<file path=ppt/slides/slide13.xml><?xml version="1.0" encoding="utf-8"?>
+<p:sld xmlns:a="http://schemas.openxmlformats.org/drawingml/2006/main" xmlns:p="http://schemas.openxmlformats.org/presentationml/2006/main" xmlns:r="http://schemas.openxmlformats.org/officeDocument/2006/relationships">
+  <p:cSld>
+    <p:spTree>
+      <p:nvGrpSpPr>
+        <p:cNvPr id="1" name=""/>
+        <p:cNvGrpSpPr/>
+        <p:nvPr/>
+      </p:nvGrpSpPr>
+      <p:grpSpPr/>
+      <p:sp>
+        <p:nvSpPr>
+          <p:cNvPr id="2" name="TextBox 1"/>
+          <p:cNvSpPr txBox="1"/>
+          <p:nvPr/>
+        </p:nvSpPr>
+        <p:spPr>
+          <a:xfrm>
+            <a:off x="457200" y="320040"/>
+            <a:ext cx="8229600" cy="822960"/>
+          </a:xfrm>
+          <a:prstGeom prst="rect">
+            <a:avLst/>
+          </a:prstGeom>
+          <a:noFill/>
+        </p:spPr>
+        <p:txBody>
+          <a:bodyPr wrap="square">
+            <a:spAutoFit/>
+          </a:bodyPr>
+          <a:lstStyle/>
+          <a:p>
+            <a:r>
+              <a:rPr sz="2600" b="1">
+                <a:solidFill>
+                  <a:srgbClr val="0B3D2E"/>
+                </a:solidFill>
+              </a:rPr>
+              <a:t>⚠️ Errores comunes</a:t>
+            </a:r>
+          </a:p>
+        </p:txBody>
+      </p:sp>
+      <p:sp>
+        <p:nvSpPr>
+          <p:cNvPr id="3" name="TextBox 2"/>
+          <p:cNvSpPr txBox="1"/>
+          <p:nvPr/>
+        </p:nvSpPr>
+        <p:spPr>
+          <a:xfrm>
+            <a:off x="457200" y="1280160"/>
+            <a:ext cx="8229600" cy="4937760"/>
+          </a:xfrm>
+          <a:prstGeom prst="rect">
+            <a:avLst/>
+          </a:prstGeom>
+          <a:noFill/>
+        </p:spPr>
+        <p:txBody>
+          <a:bodyPr wrap="square">
+            <a:spAutoFit/>
+          </a:bodyPr>
+          <a:lstStyle/>
+          <a:p>
+            <a:pPr>
+              <a:spcAft>
+                <a:spcPts val="600"/>
+              </a:spcAft>
+            </a:pPr>
+            <a:r>
+              <a:rPr sz="1500">
+                <a:solidFill>
+                  <a:srgbClr val="22282E"/>
+                </a:solidFill>
+              </a:rPr>
+              <a:t>•  Dejar que el agente explote automáticamente — Riesgo legal y de daño. Exige aprobación humana por acción.</a:t>
+            </a:r>
+          </a:p>
+          <a:p>
+            <a:pPr>
+              <a:spcAft>
+                <a:spcPts val="600"/>
+              </a:spcAft>
+            </a:pPr>
+            <a:r>
+              <a:rPr sz="1500">
+                <a:solidFill>
+                  <a:srgbClr val="22282E"/>
+                </a:solidFill>
+              </a:rPr>
+              <a:t>•  PoC que causa más daño del necesario — Limítate a demostrar; no escales el impacto.</a:t>
+            </a:r>
+          </a:p>
+          <a:p>
+            <a:pPr>
+              <a:spcAft>
+                <a:spcPts val="600"/>
+              </a:spcAft>
+            </a:pPr>
+            <a:r>
+              <a:rPr sz="1500">
+                <a:solidFill>
+                  <a:srgbClr val="22282E"/>
+                </a:solidFill>
+              </a:rPr>
+              <a:t>•  No registrar lo que se hizo — Sin trazabilidad no hay informe ni defensa legal. Loguea todo.</a:t>
+            </a:r>
+          </a:p>
+          <a:p>
+            <a:pPr>
+              <a:spcAft>
+                <a:spcPts val="600"/>
+              </a:spcAft>
+            </a:pPr>
+            <a:r>
+              <a:rPr sz="1500">
+                <a:solidFill>
+                  <a:srgbClr val="22282E"/>
+                </a:solidFill>
+              </a:rPr>
+              <a:t>•  Delegar decisiones destructivas — Nunca. Borrar/cifrar/modificar exige criterio humano explícito.</a:t>
+            </a:r>
+          </a:p>
+          <a:p>
+            <a:pPr>
+              <a:spcAft>
+                <a:spcPts val="600"/>
+              </a:spcAft>
+            </a:pPr>
+            <a:r>
+              <a:rPr sz="1500">
+                <a:solidFill>
+                  <a:srgbClr val="22282E"/>
+                </a:solidFill>
+              </a:rPr>
+              <a:t>•  Salir del alcance "porque el agente lo sugirió" — El alcance manda sobre la IA. Corta y redefine.</a:t>
+            </a:r>
+          </a:p>
+        </p:txBody>
+      </p:sp>
+    </p:spTree>
+  </p:cSld>
+  <p:clrMapOvr>
+    <a:masterClrMapping/>
+  </p:clrMapOvr>
+</p:sld>
+</file>
+
+<file path=ppt/slides/slide14.xml><?xml version="1.0" encoding="utf-8"?>
+<p:sld xmlns:a="http://schemas.openxmlformats.org/drawingml/2006/main" xmlns:p="http://schemas.openxmlformats.org/presentationml/2006/main" xmlns:r="http://schemas.openxmlformats.org/officeDocument/2006/relationships">
+  <p:cSld>
+    <p:spTree>
+      <p:nvGrpSpPr>
+        <p:cNvPr id="1" name=""/>
+        <p:cNvGrpSpPr/>
+        <p:nvPr/>
+      </p:nvGrpSpPr>
+      <p:grpSpPr/>
+      <p:sp>
+        <p:nvSpPr>
+          <p:cNvPr id="2" name="TextBox 1"/>
+          <p:cNvSpPr txBox="1"/>
+          <p:nvPr/>
+        </p:nvSpPr>
+        <p:spPr>
+          <a:xfrm>
+            <a:off x="457200" y="320040"/>
+            <a:ext cx="8229600" cy="822960"/>
+          </a:xfrm>
+          <a:prstGeom prst="rect">
+            <a:avLst/>
+          </a:prstGeom>
+          <a:noFill/>
+        </p:spPr>
+        <p:txBody>
+          <a:bodyPr wrap="square">
+            <a:spAutoFit/>
+          </a:bodyPr>
+          <a:lstStyle/>
+          <a:p>
+            <a:r>
+              <a:rPr sz="2600" b="1">
+                <a:solidFill>
+                  <a:srgbClr val="0B3D2E"/>
+                </a:solidFill>
+              </a:rPr>
+              <a:t>❓ Preguntas frecuentes</a:t>
+            </a:r>
+          </a:p>
+        </p:txBody>
+      </p:sp>
+      <p:sp>
+        <p:nvSpPr>
+          <p:cNvPr id="3" name="TextBox 2"/>
+          <p:cNvSpPr txBox="1"/>
+          <p:nvPr/>
+        </p:nvSpPr>
+        <p:spPr>
+          <a:xfrm>
+            <a:off x="457200" y="1280160"/>
+            <a:ext cx="8229600" cy="4937760"/>
+          </a:xfrm>
+          <a:prstGeom prst="rect">
+            <a:avLst/>
+          </a:prstGeom>
+          <a:noFill/>
+        </p:spPr>
+        <p:txBody>
+          <a:bodyPr wrap="square">
+            <a:spAutoFit/>
+          </a:bodyPr>
+          <a:lstStyle/>
+          <a:p>
+            <a:pPr>
+              <a:spcAft>
+                <a:spcPts val="600"/>
+              </a:spcAft>
+            </a:pPr>
+            <a:r>
+              <a:rPr sz="1500">
+                <a:solidFill>
+                  <a:srgbClr val="22282E"/>
+                </a:solidFill>
+              </a:rPr>
+              <a:t>•  ❓ ¿La IA puede explotar sola una máquina?</a:t>
+            </a:r>
+          </a:p>
+          <a:p>
+            <a:pPr>
+              <a:spcAft>
+                <a:spcPts val="600"/>
+              </a:spcAft>
+            </a:pPr>
+            <a:r>
+              <a:rPr sz="1500">
+                <a:solidFill>
+                  <a:srgbClr val="22282E"/>
+                </a:solidFill>
+              </a:rPr>
+              <a:t>•  Técnicamente puede encadenar herramientas, pero no debe hacerlo sin supervisión: el riesgo</a:t>
+            </a:r>
+          </a:p>
+          <a:p>
+            <a:pPr>
+              <a:spcAft>
+                <a:spcPts val="600"/>
+              </a:spcAft>
+            </a:pPr>
+            <a:r>
+              <a:rPr sz="1500">
+                <a:solidFill>
+                  <a:srgbClr val="22282E"/>
+                </a:solidFill>
+              </a:rPr>
+              <a:t>•  legal, de daño y de salir de alcance es demasiado alto. La responsabilidad es humana.</a:t>
+            </a:r>
+          </a:p>
+          <a:p>
+            <a:pPr>
+              <a:spcAft>
+                <a:spcPts val="600"/>
+              </a:spcAft>
+            </a:pPr>
+            <a:r>
+              <a:rPr sz="1500">
+                <a:solidFill>
+                  <a:srgbClr val="22282E"/>
+                </a:solidFill>
+              </a:rPr>
+              <a:t>•  ❓ ¿Esto no facilita el mal uso?</a:t>
+            </a:r>
+          </a:p>
+          <a:p>
+            <a:pPr>
+              <a:spcAft>
+                <a:spcPts val="600"/>
+              </a:spcAft>
+            </a:pPr>
+            <a:r>
+              <a:rPr sz="1500">
+                <a:solidFill>
+                  <a:srgbClr val="22282E"/>
+                </a:solidFill>
+              </a:rPr>
+              <a:t>•  La metodología aquí es de supervisión y control, la misma que exige un pentest profesional.</a:t>
+            </a:r>
+          </a:p>
+          <a:p>
+            <a:pPr>
+              <a:spcAft>
+                <a:spcPts val="600"/>
+              </a:spcAft>
+            </a:pPr>
+            <a:r>
+              <a:rPr sz="1500">
+                <a:solidFill>
+                  <a:srgbClr val="22282E"/>
+                </a:solidFill>
+              </a:rPr>
+              <a:t>•  El énfasis está en autorización, límites y trazabilidad — justo lo contrario del abuso.</a:t>
+            </a:r>
+          </a:p>
+        </p:txBody>
+      </p:sp>
+    </p:spTree>
+  </p:cSld>
+  <p:clrMapOvr>
+    <a:masterClrMapping/>
+  </p:clrMapOvr>
+</p:sld>
+</file>
+
+<file path=ppt/slides/slide15.xml><?xml version="1.0" encoding="utf-8"?>
+<p:sld xmlns:a="http://schemas.openxmlformats.org/drawingml/2006/main" xmlns:p="http://schemas.openxmlformats.org/presentationml/2006/main" xmlns:r="http://schemas.openxmlformats.org/officeDocument/2006/relationships">
+  <p:cSld>
+    <p:spTree>
+      <p:nvGrpSpPr>
+        <p:cNvPr id="1" name=""/>
+        <p:cNvGrpSpPr/>
+        <p:nvPr/>
+      </p:nvGrpSpPr>
+      <p:grpSpPr/>
+      <p:sp>
+        <p:nvSpPr>
+          <p:cNvPr id="2" name="TextBox 1"/>
+          <p:cNvSpPr txBox="1"/>
+          <p:nvPr/>
+        </p:nvSpPr>
+        <p:spPr>
+          <a:xfrm>
+            <a:off x="457200" y="320040"/>
+            <a:ext cx="8229600" cy="822960"/>
+          </a:xfrm>
+          <a:prstGeom prst="rect">
+            <a:avLst/>
+          </a:prstGeom>
+          <a:noFill/>
+        </p:spPr>
+        <p:txBody>
+          <a:bodyPr wrap="square">
+            <a:spAutoFit/>
+          </a:bodyPr>
+          <a:lstStyle/>
+          <a:p>
+            <a:r>
+              <a:rPr sz="2600" b="1">
+                <a:solidFill>
+                  <a:srgbClr val="0B3D2E"/>
+                </a:solidFill>
+              </a:rPr>
+              <a:t>🔗 Referencias</a:t>
+            </a:r>
+          </a:p>
+        </p:txBody>
+      </p:sp>
+      <p:sp>
+        <p:nvSpPr>
+          <p:cNvPr id="3" name="TextBox 2"/>
+          <p:cNvSpPr txBox="1"/>
+          <p:nvPr/>
+        </p:nvSpPr>
+        <p:spPr>
+          <a:xfrm>
+            <a:off x="457200" y="1280160"/>
+            <a:ext cx="8229600" cy="4937760"/>
+          </a:xfrm>
+          <a:prstGeom prst="rect">
+            <a:avLst/>
+          </a:prstGeom>
+          <a:noFill/>
+        </p:spPr>
+        <p:txBody>
+          <a:bodyPr wrap="square">
+            <a:spAutoFit/>
+          </a:bodyPr>
+          <a:lstStyle/>
+          <a:p>
+            <a:pPr>
+              <a:spcAft>
+                <a:spcPts val="600"/>
+              </a:spcAft>
+            </a:pPr>
+            <a:r>
+              <a:rPr sz="1500">
+                <a:solidFill>
+                  <a:srgbClr val="22282E"/>
+                </a:solidFill>
+              </a:rPr>
               <a:t>•  PTES — Exploitation / Post-Exploitation</a:t>
             </a:r>
           </a:p>
@@ -3599,6 +4035,81 @@
           </a:p>
         </p:txBody>
       </p:sp>
+    </p:spTree>
+  </p:cSld>
+  <p:clrMapOvr>
+    <a:masterClrMapping/>
+  </p:clrMapOvr>
+</p:sld>
+</file>
+
+<file path=ppt/slides/slide16.xml><?xml version="1.0" encoding="utf-8"?>
+<p:sld xmlns:a="http://schemas.openxmlformats.org/drawingml/2006/main" xmlns:p="http://schemas.openxmlformats.org/presentationml/2006/main" xmlns:r="http://schemas.openxmlformats.org/officeDocument/2006/relationships">
+  <p:cSld>
+    <p:spTree>
+      <p:nvGrpSpPr>
+        <p:cNvPr id="1" name=""/>
+        <p:cNvGrpSpPr/>
+        <p:nvPr/>
+      </p:nvGrpSpPr>
+      <p:grpSpPr/>
+      <p:sp>
+        <p:nvSpPr>
+          <p:cNvPr id="2" name="TextBox 1"/>
+          <p:cNvSpPr txBox="1"/>
+          <p:nvPr/>
+        </p:nvSpPr>
+        <p:spPr>
+          <a:xfrm>
+            <a:off x="457200" y="274320"/>
+            <a:ext cx="8229600" cy="640080"/>
+          </a:xfrm>
+          <a:prstGeom prst="rect">
+            <a:avLst/>
+          </a:prstGeom>
+          <a:noFill/>
+        </p:spPr>
+        <p:txBody>
+          <a:bodyPr wrap="square">
+            <a:spAutoFit/>
+          </a:bodyPr>
+          <a:lstStyle/>
+          <a:p>
+            <a:r>
+              <a:rPr sz="2200" b="1">
+                <a:solidFill>
+                  <a:srgbClr val="0B3D2E"/>
+                </a:solidFill>
+              </a:rPr>
+              <a:t>Diagrama de la clase</a:t>
+            </a:r>
+          </a:p>
+        </p:txBody>
+      </p:sp>
+      <p:pic>
+        <p:nvPicPr>
+          <p:cNvPr id="3" name="Picture 2" descr="89f0485533174ae6.png"/>
+          <p:cNvPicPr>
+            <a:picLocks noChangeAspect="1"/>
+          </p:cNvPicPr>
+          <p:nvPr/>
+        </p:nvPicPr>
+        <p:blipFill>
+          <a:blip r:embed="rId2"/>
+          <a:stretch>
+            <a:fillRect/>
+          </a:stretch>
+        </p:blipFill>
+        <p:spPr>
+          <a:xfrm>
+            <a:off x="457200" y="3347876"/>
+            <a:ext cx="8229599" cy="802328"/>
+          </a:xfrm>
+          <a:prstGeom prst="rect">
+            <a:avLst/>
+          </a:prstGeom>
+        </p:spPr>
+      </p:pic>
     </p:spTree>
   </p:cSld>
   <p:clrMapOvr>
@@ -4092,7 +4603,7 @@
                   <a:srgbClr val="0B3D2E"/>
                 </a:solidFill>
               </a:rPr>
-              <a:t>📖 Definiciones y características</a:t>
+              <a:t>🧠 Explicación en profundidad</a:t>
             </a:r>
           </a:p>
         </p:txBody>
@@ -4130,97 +4641,37 @@
                   <a:srgbClr val="22282E"/>
                 </a:solidFill>
               </a:rPr>
-              <a:t>•  Supervisión humana (human-in-the-loop)</a:t>
-            </a:r>
-          </a:p>
-          <a:p>
-            <a:pPr>
-              <a:spcAft>
-                <a:spcPts val="600"/>
-              </a:spcAft>
-            </a:pPr>
-            <a:r>
-              <a:rPr sz="1500">
-                <a:solidFill>
-                  <a:srgbClr val="22282E"/>
-                </a:solidFill>
-              </a:rPr>
-              <a:t>•  Toda acción con impacto pasa por aprobación de una persona antes de ejecutarse. Es el control central de esta clase.</a:t>
-            </a:r>
-          </a:p>
-          <a:p>
-            <a:pPr>
-              <a:spcAft>
-                <a:spcPts val="600"/>
-              </a:spcAft>
-            </a:pPr>
-            <a:r>
-              <a:rPr sz="1500">
-                <a:solidFill>
-                  <a:srgbClr val="22282E"/>
-                </a:solidFill>
-              </a:rPr>
-              <a:t>•  Prueba de concepto (PoC) controlada</a:t>
-            </a:r>
-          </a:p>
-          <a:p>
-            <a:pPr>
-              <a:spcAft>
-                <a:spcPts val="600"/>
-              </a:spcAft>
-            </a:pPr>
-            <a:r>
-              <a:rPr sz="1500">
-                <a:solidFill>
-                  <a:srgbClr val="22282E"/>
-                </a:solidFill>
-              </a:rPr>
-              <a:t>•  Demostrar que una vulnerabilidad es explotable con el mínimo impacto necesario (p. ej. un whoami), sin escalar daño.</a:t>
-            </a:r>
-          </a:p>
-          <a:p>
-            <a:pPr>
-              <a:spcAft>
-                <a:spcPts val="600"/>
-              </a:spcAft>
-            </a:pPr>
-            <a:r>
-              <a:rPr sz="1500">
-                <a:solidFill>
-                  <a:srgbClr val="22282E"/>
-                </a:solidFill>
-              </a:rPr>
-              <a:t>•  Trazabilidad</a:t>
-            </a:r>
-          </a:p>
-          <a:p>
-            <a:pPr>
-              <a:spcAft>
-                <a:spcPts val="600"/>
-              </a:spcAft>
-            </a:pPr>
-            <a:r>
-              <a:rPr sz="1500">
-                <a:solidFill>
-                  <a:srgbClr val="22282E"/>
-                </a:solidFill>
-              </a:rPr>
-              <a:t>•  Registro completo y ordenado de cada acción, comando y resultado, imprescindible para el informe y para la responsabilidad legal.</a:t>
-            </a:r>
-          </a:p>
-          <a:p>
-            <a:pPr>
-              <a:spcAft>
-                <a:spcPts val="600"/>
-              </a:spcAft>
-            </a:pPr>
-            <a:r>
-              <a:rPr sz="1500">
-                <a:solidFill>
-                  <a:srgbClr val="22282E"/>
-                </a:solidFill>
-              </a:rPr>
-              <a:t>•  Alcance de post-explotación</a:t>
+              <a:t>•  La explotación asistida aumenta velocidad y riesgo de daño. Se exige prueba mínima, aprobación por etapa, límites de efecto, deconfliction y cleanup. La capacidad de generar un payload no constituye…</a:t>
+            </a:r>
+          </a:p>
+          <a:p>
+            <a:pPr>
+              <a:spcAft>
+                <a:spcPts val="600"/>
+              </a:spcAft>
+            </a:pPr>
+            <a:r>
+              <a:rPr sz="1500">
+                <a:solidFill>
+                  <a:srgbClr val="22282E"/>
+                </a:solidFill>
+              </a:rPr>
+              <a:t>•  El diagrama separa lenguaje de autoridad. El modelo puede proponer; la política determina si la operación pertenece al alcance; la herramienta produce evidencia; y una persona o control determinista…</a:t>
+            </a:r>
+          </a:p>
+          <a:p>
+            <a:pPr>
+              <a:spcAft>
+                <a:spcPts val="600"/>
+              </a:spcAft>
+            </a:pPr>
+            <a:r>
+              <a:rPr sz="1500">
+                <a:solidFill>
+                  <a:srgbClr val="22282E"/>
+                </a:solidFill>
+              </a:rPr>
+              <a:t>•  El objetivo se demuestra con lectura de un marcador. El agente no descarga datos reales ni busca persistencia.</a:t>
             </a:r>
           </a:p>
         </p:txBody>
@@ -4271,7 +4722,7 @@
                   <a:srgbClr val="0B3D2E"/>
                 </a:solidFill>
               </a:rPr>
-              <a:t>🧰 Herramientas y preparación</a:t>
+              <a:t>📔 Glosario operativo</a:t>
             </a:r>
           </a:p>
         </p:txBody>
@@ -4309,22 +4760,52 @@
                   <a:srgbClr val="22282E"/>
                 </a:solidFill>
               </a:rPr>
-              <a:t>•  kali-mcp contra una VM vulnerable tuya (p. ej. Metasploitable/DVWA en red aislada). El</a:t>
-            </a:r>
-          </a:p>
-          <a:p>
-            <a:pPr>
-              <a:spcAft>
-                <a:spcPts val="600"/>
-              </a:spcAft>
-            </a:pPr>
-            <a:r>
-              <a:rPr sz="1500">
-                <a:solidFill>
-                  <a:srgbClr val="22282E"/>
-                </a:solidFill>
-              </a:rPr>
-              <a:t>•  agente puede sugerir vectores; tú apruebas y ejecutas. Mantén un registro de la sesión.</a:t>
+              <a:t>•  Término — Definición</a:t>
+            </a:r>
+          </a:p>
+          <a:p>
+            <a:pPr>
+              <a:spcAft>
+                <a:spcPts val="600"/>
+              </a:spcAft>
+            </a:pPr>
+            <a:r>
+              <a:rPr sz="1500">
+                <a:solidFill>
+                  <a:srgbClr val="22282E"/>
+                </a:solidFill>
+              </a:rPr>
+              <a:t>•  Proof of impact — Evidencia mínima suficiente del efecto autorizado.</a:t>
+            </a:r>
+          </a:p>
+          <a:p>
+            <a:pPr>
+              <a:spcAft>
+                <a:spcPts val="600"/>
+              </a:spcAft>
+            </a:pPr>
+            <a:r>
+              <a:rPr sz="1500">
+                <a:solidFill>
+                  <a:srgbClr val="22282E"/>
+                </a:solidFill>
+              </a:rPr>
+              <a:t>•  Guardrail — Capa que reduce una capacidad o detecta su uso; no garantía absoluta.</a:t>
+            </a:r>
+          </a:p>
+          <a:p>
+            <a:pPr>
+              <a:spcAft>
+                <a:spcPts val="600"/>
+              </a:spcAft>
+            </a:pPr>
+            <a:r>
+              <a:rPr sz="1500">
+                <a:solidFill>
+                  <a:srgbClr val="22282E"/>
+                </a:solidFill>
+              </a:rPr>
+              <a:t>•  Audit trail — Registro ordenado de solicitudes, decisiones, ejecuciones y resultados.</a:t>
             </a:r>
           </a:p>
         </p:txBody>
@@ -4375,7 +4856,7 @@
                   <a:srgbClr val="0B3D2E"/>
                 </a:solidFill>
               </a:rPr>
-              <a:t>🧪 Laboratorio guiado</a:t>
+              <a:t>✅ Criterio de dominio</a:t>
             </a:r>
           </a:p>
         </p:txBody>
@@ -4413,67 +4894,7 @@
                   <a:srgbClr val="22282E"/>
                 </a:solidFill>
               </a:rPr>
-              <a:t>•  Priorización de vectores. Pide al agente que, a partir del recon, priorice posibles vías de entrada sin ejecutarlas. Revisa su razonamiento.</a:t>
-            </a:r>
-          </a:p>
-          <a:p>
-            <a:pPr>
-              <a:spcAft>
-                <a:spcPts val="600"/>
-              </a:spcAft>
-            </a:pPr>
-            <a:r>
-              <a:rPr sz="1500">
-                <a:solidFill>
-                  <a:srgbClr val="22282E"/>
-                </a:solidFill>
-              </a:rPr>
-              <a:t>•  Decisión humana. Elige tú un vector de PoC de bajo impacto y apruébalo explícitamente.</a:t>
-            </a:r>
-          </a:p>
-          <a:p>
-            <a:pPr>
-              <a:spcAft>
-                <a:spcPts val="600"/>
-              </a:spcAft>
-            </a:pPr>
-            <a:r>
-              <a:rPr sz="1500">
-                <a:solidFill>
-                  <a:srgbClr val="22282E"/>
-                </a:solidFill>
-              </a:rPr>
-              <a:t>•  Ejecución supervisada. Ejecuta la PoC (p. ej. demostrar acceso con un comando inocuo). Registra comando y resultado.</a:t>
-            </a:r>
-          </a:p>
-          <a:p>
-            <a:pPr>
-              <a:spcAft>
-                <a:spcPts val="600"/>
-              </a:spcAft>
-            </a:pPr>
-            <a:r>
-              <a:rPr sz="1500">
-                <a:solidFill>
-                  <a:srgbClr val="22282E"/>
-                </a:solidFill>
-              </a:rPr>
-              <a:t>•  Post-explotación mínima. Enumera el sistema para demostrar impacto sin tocar datos ni escalar daño.</a:t>
-            </a:r>
-          </a:p>
-          <a:p>
-            <a:pPr>
-              <a:spcAft>
-                <a:spcPts val="600"/>
-              </a:spcAft>
-            </a:pPr>
-            <a:r>
-              <a:rPr sz="1500">
-                <a:solidFill>
-                  <a:srgbClr val="22282E"/>
-                </a:solidFill>
-              </a:rPr>
-              <a:t>•  Trazabilidad. Reconstruye la línea de tiempo de la sesión: cada acción aprobada, ejecutada y su evidencia.</a:t>
+              <a:t>•  El alumno demuestra dominio cuando reproduce el flujo completo, puede atribuir cada acción, evita que texto no confiable otorgue autoridad y explica qué control contiene un fallo del modelo.</a:t>
             </a:r>
           </a:p>
         </p:txBody>
@@ -4524,7 +4945,7 @@
                   <a:srgbClr val="0B3D2E"/>
                 </a:solidFill>
               </a:rPr>
-              <a:t>✍️ Ejercicios</a:t>
+              <a:t>📖 Definiciones y características</a:t>
             </a:r>
           </a:p>
         </p:txBody>
@@ -4562,67 +4983,97 @@
                   <a:srgbClr val="22282E"/>
                 </a:solidFill>
               </a:rPr>
-              <a:t>•  ¿Por qué la decisión de explotar no debe delegarse en la IA?</a:t>
-            </a:r>
-          </a:p>
-          <a:p>
-            <a:pPr>
-              <a:spcAft>
-                <a:spcPts val="600"/>
-              </a:spcAft>
-            </a:pPr>
-            <a:r>
-              <a:rPr sz="1500">
-                <a:solidFill>
-                  <a:srgbClr val="22282E"/>
-                </a:solidFill>
-              </a:rPr>
-              <a:t>•  Define 3 acciones que siempre requieren aprobación humana.</a:t>
-            </a:r>
-          </a:p>
-          <a:p>
-            <a:pPr>
-              <a:spcAft>
-                <a:spcPts val="600"/>
-              </a:spcAft>
-            </a:pPr>
-            <a:r>
-              <a:rPr sz="1500">
-                <a:solidFill>
-                  <a:srgbClr val="22282E"/>
-                </a:solidFill>
-              </a:rPr>
-              <a:t>•  Diseña el registro mínimo de trazabilidad de una acción de explotación.</a:t>
-            </a:r>
-          </a:p>
-          <a:p>
-            <a:pPr>
-              <a:spcAft>
-                <a:spcPts val="600"/>
-              </a:spcAft>
-            </a:pPr>
-            <a:r>
-              <a:rPr sz="1500">
-                <a:solidFill>
-                  <a:srgbClr val="22282E"/>
-                </a:solidFill>
-              </a:rPr>
-              <a:t>•  ¿Qué es una PoC de bajo impacto y por qué se prefiere?</a:t>
-            </a:r>
-          </a:p>
-          <a:p>
-            <a:pPr>
-              <a:spcAft>
-                <a:spcPts val="600"/>
-              </a:spcAft>
-            </a:pPr>
-            <a:r>
-              <a:rPr sz="1500">
-                <a:solidFill>
-                  <a:srgbClr val="22282E"/>
-                </a:solidFill>
-              </a:rPr>
-              <a:t>•  Enumera límites de post-explotación que pondrías por escrito en las RoE.</a:t>
+              <a:t>•  Supervisión humana (human-in-the-loop)</a:t>
+            </a:r>
+          </a:p>
+          <a:p>
+            <a:pPr>
+              <a:spcAft>
+                <a:spcPts val="600"/>
+              </a:spcAft>
+            </a:pPr>
+            <a:r>
+              <a:rPr sz="1500">
+                <a:solidFill>
+                  <a:srgbClr val="22282E"/>
+                </a:solidFill>
+              </a:rPr>
+              <a:t>•  Toda acción con impacto pasa por aprobación de una persona antes de ejecutarse. Es el control central de esta clase.</a:t>
+            </a:r>
+          </a:p>
+          <a:p>
+            <a:pPr>
+              <a:spcAft>
+                <a:spcPts val="600"/>
+              </a:spcAft>
+            </a:pPr>
+            <a:r>
+              <a:rPr sz="1500">
+                <a:solidFill>
+                  <a:srgbClr val="22282E"/>
+                </a:solidFill>
+              </a:rPr>
+              <a:t>•  Prueba de concepto (PoC) controlada</a:t>
+            </a:r>
+          </a:p>
+          <a:p>
+            <a:pPr>
+              <a:spcAft>
+                <a:spcPts val="600"/>
+              </a:spcAft>
+            </a:pPr>
+            <a:r>
+              <a:rPr sz="1500">
+                <a:solidFill>
+                  <a:srgbClr val="22282E"/>
+                </a:solidFill>
+              </a:rPr>
+              <a:t>•  Demostrar que una vulnerabilidad es explotable con el mínimo impacto necesario (p. ej. un whoami), sin escalar daño.</a:t>
+            </a:r>
+          </a:p>
+          <a:p>
+            <a:pPr>
+              <a:spcAft>
+                <a:spcPts val="600"/>
+              </a:spcAft>
+            </a:pPr>
+            <a:r>
+              <a:rPr sz="1500">
+                <a:solidFill>
+                  <a:srgbClr val="22282E"/>
+                </a:solidFill>
+              </a:rPr>
+              <a:t>•  Trazabilidad</a:t>
+            </a:r>
+          </a:p>
+          <a:p>
+            <a:pPr>
+              <a:spcAft>
+                <a:spcPts val="600"/>
+              </a:spcAft>
+            </a:pPr>
+            <a:r>
+              <a:rPr sz="1500">
+                <a:solidFill>
+                  <a:srgbClr val="22282E"/>
+                </a:solidFill>
+              </a:rPr>
+              <a:t>•  Registro completo y ordenado de cada acción, comando y resultado, imprescindible para el informe y para la responsabilidad legal.</a:t>
+            </a:r>
+          </a:p>
+          <a:p>
+            <a:pPr>
+              <a:spcAft>
+                <a:spcPts val="600"/>
+              </a:spcAft>
+            </a:pPr>
+            <a:r>
+              <a:rPr sz="1500">
+                <a:solidFill>
+                  <a:srgbClr val="22282E"/>
+                </a:solidFill>
+              </a:rPr>
+              <a:t>•  Alcance de post-explotación</a:t>
             </a:r>
           </a:p>
         </p:txBody>
@@ -4673,7 +5124,7 @@
                   <a:srgbClr val="0B3D2E"/>
                 </a:solidFill>
               </a:rPr>
-              <a:t>📝 Reto verificable</a:t>
+              <a:t>🧰 Herramientas y preparación</a:t>
             </a:r>
           </a:p>
         </p:txBody>
@@ -4711,52 +5162,22 @@
                   <a:srgbClr val="22282E"/>
                 </a:solidFill>
               </a:rPr>
-              <a:t>•  Demuestra, en tu VM, una vulnerabilidad con una PoC de bajo impacto asistido por el agente,</a:t>
-            </a:r>
-          </a:p>
-          <a:p>
-            <a:pPr>
-              <a:spcAft>
-                <a:spcPts val="600"/>
-              </a:spcAft>
-            </a:pPr>
-            <a:r>
-              <a:rPr sz="1500">
-                <a:solidFill>
-                  <a:srgbClr val="22282E"/>
-                </a:solidFill>
-              </a:rPr>
-              <a:t>•  con trazabilidad completa.</a:t>
-            </a:r>
-          </a:p>
-          <a:p>
-            <a:pPr>
-              <a:spcAft>
-                <a:spcPts val="600"/>
-              </a:spcAft>
-            </a:pPr>
-            <a:r>
-              <a:rPr sz="1500">
-                <a:solidFill>
-                  <a:srgbClr val="22282E"/>
-                </a:solidFill>
-              </a:rPr>
-              <a:t>•  Criterio de aceptación: cada acción con impacto fue aprobada por ti antes de ejecutarse;</a:t>
-            </a:r>
-          </a:p>
-          <a:p>
-            <a:pPr>
-              <a:spcAft>
-                <a:spcPts val="600"/>
-              </a:spcAft>
-            </a:pPr>
-            <a:r>
-              <a:rPr sz="1500">
-                <a:solidFill>
-                  <a:srgbClr val="22282E"/>
-                </a:solidFill>
-              </a:rPr>
-              <a:t>•  existe un registro reproducible; no se tocaron datos reales ni se salió del alcance.</a:t>
+              <a:t>•  kali-mcp contra una VM vulnerable tuya (p. ej. Metasploitable/DVWA en red aislada). El</a:t>
+            </a:r>
+          </a:p>
+          <a:p>
+            <a:pPr>
+              <a:spcAft>
+                <a:spcPts val="600"/>
+              </a:spcAft>
+            </a:pPr>
+            <a:r>
+              <a:rPr sz="1500">
+                <a:solidFill>
+                  <a:srgbClr val="22282E"/>
+                </a:solidFill>
+              </a:rPr>
+              <a:t>•  agente puede sugerir vectores; tú apruebas y ejecutas. Mantén un registro de la sesión.</a:t>
             </a:r>
           </a:p>
         </p:txBody>
